--- a/06-final-report/figures/fig-5-experiment-setup.pptx
+++ b/06-final-report/figures/fig-5-experiment-setup.pptx
@@ -1218,7 +1218,7 @@
                 <a:ea typeface="맑은 고딕" pitchFamily="34" charset="-122"/>
                 <a:cs typeface="맑은 고딕" pitchFamily="34" charset="-120"/>
               </a:rPr>
-              <a:t>500건, 4테넌트</a:t>
+              <a:t>500건, 4명 (등급별 1명)</a:t>
             </a:r>
             <a:endParaRPr lang="en-US" sz="900" dirty="0"/>
           </a:p>
